--- a/01-lecture-git-basic/slides/01-d-cli.pptx
+++ b/01-lecture-git-basic/slides/01-d-cli.pptx
@@ -241,7 +241,7 @@
           </a:lstStyle>
           <a:p>
             <a:fld id="{6B8D1B20-A248-FB47-8240-73C0C5F47C9D}" type="datetimeFigureOut">
-              <a:t>2026/2/27</a:t>
+              <a:t>2026/3/9</a:t>
             </a:fld>
             <a:endParaRPr kumimoji="1" lang="ja-JP" altLang="en-US"/>
           </a:p>
@@ -21109,7 +21109,7 @@
           <p:nvPr/>
         </p:nvPicPr>
         <p:blipFill>
-          <a:blip r:embed="rId2">
+          <a:blip r:embed="rId2" cstate="print">
             <a:extLst>
               <a:ext uri="{28A0092B-C50C-407E-A947-70E740481C1C}">
                 <a14:useLocalDpi xmlns:a14="http://schemas.microsoft.com/office/drawing/2010/main" val="0"/>
@@ -22882,7 +22882,7 @@
           <p:nvPr/>
         </p:nvPicPr>
         <p:blipFill>
-          <a:blip r:embed="rId6">
+          <a:blip r:embed="rId6" cstate="print">
             <a:extLst>
               <a:ext uri="{28A0092B-C50C-407E-A947-70E740481C1C}">
                 <a14:useLocalDpi xmlns:a14="http://schemas.microsoft.com/office/drawing/2010/main" val="0"/>
